--- a/report/public/templates/weekly.pptx
+++ b/report/public/templates/weekly.pptx
@@ -12801,7 +12801,75 @@
                           <a:latin typeface="+mn-ea"/>
                           <a:ea typeface="+mn-ea"/>
                         </a:rPr>
-                        <a:t>하자 치유 수</a:t>
+                        <a:t>이번 주 치유</a:t>
+                      </a:r>
+                    </a:p>
+                  </a:txBody>
+                  <a:tcPr anchor="ctr">
+                    <a:lnL w="9525" cap="flat" cmpd="sng" algn="ctr">
+                      <a:solidFill>
+                        <a:schemeClr val="tx1"/>
+                      </a:solidFill>
+                      <a:prstDash val="solid"/>
+                      <a:round/>
+                      <a:headEnd type="none" w="med" len="med"/>
+                      <a:tailEnd type="none" w="med" len="med"/>
+                    </a:lnL>
+                    <a:lnR w="9525" cap="flat" cmpd="sng" algn="ctr">
+                      <a:solidFill>
+                        <a:schemeClr val="tx1"/>
+                      </a:solidFill>
+                      <a:prstDash val="solid"/>
+                      <a:round/>
+                      <a:headEnd type="none" w="med" len="med"/>
+                      <a:tailEnd type="none" w="med" len="med"/>
+                    </a:lnR>
+                    <a:lnT w="12700" cap="flat" cmpd="sng" algn="ctr">
+                      <a:solidFill>
+                        <a:schemeClr val="tx1"/>
+                      </a:solidFill>
+                      <a:prstDash val="solid"/>
+                      <a:round/>
+                      <a:headEnd type="none" w="med" len="med"/>
+                      <a:tailEnd type="none" w="med" len="med"/>
+                    </a:lnT>
+                    <a:lnB w="9525" cap="flat" cmpd="sng" algn="ctr">
+                      <a:solidFill>
+                        <a:schemeClr val="tx1"/>
+                      </a:solidFill>
+                      <a:prstDash val="solid"/>
+                      <a:round/>
+                      <a:headEnd type="none" w="med" len="med"/>
+                      <a:tailEnd type="none" w="med" len="med"/>
+                    </a:lnB>
+                    <a:solidFill>
+                      <a:srgbClr val="D9D6EC"/>
+                    </a:solidFill>
+                  </a:tcPr>
+                </a:tc>
+                <a:tc>
+                  <a:txBody>
+                    <a:bodyPr/>
+                    <a:lstStyle/>
+                    <a:p>
+                      <a:pPr algn="ctr" latinLnBrk="1">
+                        <a:lnSpc>
+                          <a:spcPct val="130000"/>
+                        </a:lnSpc>
+                      </a:pPr>
+                      <a:r>
+                        <a:rPr lang="ko-KR" altLang="en-US" sz="1600" b="1" spc="-100" baseline="0" dirty="0">
+                          <a:ln>
+                            <a:solidFill>
+                              <a:schemeClr val="accent1">
+                                <a:alpha val="0"/>
+                              </a:schemeClr>
+                            </a:solidFill>
+                          </a:ln>
+                          <a:latin typeface="+mn-ea"/>
+                          <a:ea typeface="+mn-ea"/>
+                        </a:rPr>
+                        <a:t>하자 치유 누적</a:t>
                       </a:r>
                     </a:p>
                   </a:txBody>
@@ -12870,74 +12938,6 @@
                           <a:ea typeface="+mn-ea"/>
                         </a:rPr>
                         <a:t>진행률</a:t>
-                      </a:r>
-                    </a:p>
-                  </a:txBody>
-                  <a:tcPr anchor="ctr">
-                    <a:lnL w="9525" cap="flat" cmpd="sng" algn="ctr">
-                      <a:solidFill>
-                        <a:schemeClr val="tx1"/>
-                      </a:solidFill>
-                      <a:prstDash val="solid"/>
-                      <a:round/>
-                      <a:headEnd type="none" w="med" len="med"/>
-                      <a:tailEnd type="none" w="med" len="med"/>
-                    </a:lnL>
-                    <a:lnR w="9525" cap="flat" cmpd="sng" algn="ctr">
-                      <a:solidFill>
-                        <a:schemeClr val="tx1"/>
-                      </a:solidFill>
-                      <a:prstDash val="solid"/>
-                      <a:round/>
-                      <a:headEnd type="none" w="med" len="med"/>
-                      <a:tailEnd type="none" w="med" len="med"/>
-                    </a:lnR>
-                    <a:lnT w="12700" cap="flat" cmpd="sng" algn="ctr">
-                      <a:solidFill>
-                        <a:schemeClr val="tx1"/>
-                      </a:solidFill>
-                      <a:prstDash val="solid"/>
-                      <a:round/>
-                      <a:headEnd type="none" w="med" len="med"/>
-                      <a:tailEnd type="none" w="med" len="med"/>
-                    </a:lnT>
-                    <a:lnB w="9525" cap="flat" cmpd="sng" algn="ctr">
-                      <a:solidFill>
-                        <a:schemeClr val="tx1"/>
-                      </a:solidFill>
-                      <a:prstDash val="solid"/>
-                      <a:round/>
-                      <a:headEnd type="none" w="med" len="med"/>
-                      <a:tailEnd type="none" w="med" len="med"/>
-                    </a:lnB>
-                    <a:solidFill>
-                      <a:srgbClr val="D9D6EC"/>
-                    </a:solidFill>
-                  </a:tcPr>
-                </a:tc>
-                <a:tc>
-                  <a:txBody>
-                    <a:bodyPr/>
-                    <a:lstStyle/>
-                    <a:p>
-                      <a:pPr algn="ctr" latinLnBrk="1">
-                        <a:lnSpc>
-                          <a:spcPct val="130000"/>
-                        </a:lnSpc>
-                      </a:pPr>
-                      <a:r>
-                        <a:rPr lang="ko-KR" altLang="en-US" sz="1600" b="1" spc="-100" baseline="0" dirty="0">
-                          <a:ln>
-                            <a:solidFill>
-                              <a:schemeClr val="accent1">
-                                <a:alpha val="0"/>
-                              </a:schemeClr>
-                            </a:solidFill>
-                          </a:ln>
-                          <a:latin typeface="+mn-ea"/>
-                          <a:ea typeface="+mn-ea"/>
-                        </a:rPr>
-                        <a:t>비고</a:t>
                       </a:r>
                     </a:p>
                   </a:txBody>
@@ -13151,31 +13151,13 @@
                             </a:solidFill>
                           </a:ln>
                           <a:solidFill>
-                            <a:schemeClr val="tx1"/>
-                          </a:solidFill>
-                          <a:latin typeface="+mn-ea"/>
-                          <a:ea typeface="+mn-ea"/>
-                          <a:cs typeface="+mn-cs"/>
-                        </a:rPr>
-                        <a:t>{전기_치유}</a:t>
-                      </a:r>
-                      <a:r>
-                        <a:rPr lang="en-US" altLang="ko-KR" sz="1600" b="1" kern="1200" spc="-100" baseline="0" dirty="0">
-                          <a:ln>
-                            <a:solidFill>
-                              <a:schemeClr val="accent1">
-                                <a:alpha val="0"/>
-                              </a:schemeClr>
-                            </a:solidFill>
-                          </a:ln>
-                          <a:solidFill>
                             <a:srgbClr val="FF0000"/>
                           </a:solidFill>
                           <a:latin typeface="+mn-ea"/>
                           <a:ea typeface="+mn-ea"/>
                           <a:cs typeface="+mn-cs"/>
                         </a:rPr>
-                        <a:t>{전기_치유증감}</a:t>
+                        <a:t>{전기_이번주}</a:t>
                       </a:r>
                     </a:p>
                   </a:txBody>
@@ -13247,25 +13229,7 @@
                           <a:ea typeface="+mn-ea"/>
                           <a:cs typeface="+mn-cs"/>
                         </a:rPr>
-                        <a:t>{전기_진행률}</a:t>
-                      </a:r>
-                      <a:r>
-                        <a:rPr lang="en-US" altLang="ko-KR" sz="1600" b="1" kern="1200" spc="-100" baseline="0" dirty="0">
-                          <a:ln>
-                            <a:solidFill>
-                              <a:schemeClr val="accent1">
-                                <a:alpha val="0"/>
-                              </a:schemeClr>
-                            </a:solidFill>
-                          </a:ln>
-                          <a:solidFill>
-                            <a:srgbClr val="FF0000"/>
-                          </a:solidFill>
-                          <a:latin typeface="+mn-ea"/>
-                          <a:ea typeface="+mn-ea"/>
-                          <a:cs typeface="+mn-cs"/>
-                        </a:rPr>
-                        <a:t>{전기_진행률증감}</a:t>
+                        <a:t>{전기_누적}</a:t>
                       </a:r>
                     </a:p>
                   </a:txBody>
@@ -13321,6 +13285,9 @@
                           <a:spcPct val="130000"/>
                         </a:lnSpc>
                       </a:pPr>
+                      <a:r>
+                        <a:t>{전기_진행률}</a:t>
+                      </a:r>
                       <a:endParaRPr lang="en-US" altLang="ko-KR" sz="1600" b="1" kern="1200" spc="-100" baseline="0" dirty="0">
                         <a:ln>
                           <a:solidFill>
@@ -13548,31 +13515,13 @@
                             </a:solidFill>
                           </a:ln>
                           <a:solidFill>
-                            <a:schemeClr val="tx1"/>
-                          </a:solidFill>
-                          <a:latin typeface="+mn-ea"/>
-                          <a:ea typeface="+mn-ea"/>
-                          <a:cs typeface="+mn-cs"/>
-                        </a:rPr>
-                        <a:t>{건축_치유}</a:t>
-                      </a:r>
-                      <a:r>
-                        <a:rPr lang="en-US" altLang="ko-KR" sz="1600" b="1" kern="1200" spc="-100" baseline="0" dirty="0">
-                          <a:ln>
-                            <a:solidFill>
-                              <a:schemeClr val="accent1">
-                                <a:alpha val="0"/>
-                              </a:schemeClr>
-                            </a:solidFill>
-                          </a:ln>
-                          <a:solidFill>
                             <a:srgbClr val="FF0000"/>
                           </a:solidFill>
                           <a:latin typeface="+mn-ea"/>
                           <a:ea typeface="+mn-ea"/>
                           <a:cs typeface="+mn-cs"/>
                         </a:rPr>
-                        <a:t>{건축_치유증감}</a:t>
+                        <a:t>{건축_이번주}</a:t>
                       </a:r>
                     </a:p>
                   </a:txBody>
@@ -13644,25 +13593,7 @@
                           <a:ea typeface="+mn-ea"/>
                           <a:cs typeface="+mn-cs"/>
                         </a:rPr>
-                        <a:t>{건축_진행률}</a:t>
-                      </a:r>
-                      <a:r>
-                        <a:rPr lang="en-US" altLang="ko-KR" sz="1600" b="1" kern="1200" spc="-100" baseline="0" dirty="0">
-                          <a:ln>
-                            <a:solidFill>
-                              <a:schemeClr val="accent1">
-                                <a:alpha val="0"/>
-                              </a:schemeClr>
-                            </a:solidFill>
-                          </a:ln>
-                          <a:solidFill>
-                            <a:srgbClr val="FF0000"/>
-                          </a:solidFill>
-                          <a:latin typeface="+mn-ea"/>
-                          <a:ea typeface="+mn-ea"/>
-                          <a:cs typeface="+mn-cs"/>
-                        </a:rPr>
-                        <a:t>{건축_진행률증감}</a:t>
+                        <a:t>{건축_누적}</a:t>
                       </a:r>
                     </a:p>
                   </a:txBody>
@@ -13718,6 +13649,9 @@
                           <a:spcPct val="130000"/>
                         </a:lnSpc>
                       </a:pPr>
+                      <a:r>
+                        <a:t>{건축_진행률}</a:t>
+                      </a:r>
                       <a:endParaRPr lang="en-US" altLang="ko-KR" sz="1600" b="1" kern="1200" spc="-100" baseline="0" dirty="0">
                         <a:ln>
                           <a:solidFill>
@@ -13921,18 +13855,13 @@
                               </a:schemeClr>
                             </a:solidFill>
                           </a:ln>
+                          <a:solidFill>
+                            <a:srgbClr val="FF0000"/>
+                          </a:solidFill>
                           <a:latin typeface="+mn-ea"/>
                           <a:ea typeface="+mn-ea"/>
                         </a:rPr>
-                        <a:t>{기계_치유}</a:t>
-                      </a:r>
-                      <a:r>
-                        <a:rPr b="1" sz="1600">
-                          <a:solidFill>
-                            <a:srgbClr val="FF0000"/>
-                          </a:solidFill>
-                        </a:rPr>
-                        <a:t>{기계_치유증감}</a:t>
+                        <a:t>{기계_이번주}</a:t>
                       </a:r>
                     </a:p>
                   </a:txBody>
@@ -14000,15 +13929,7 @@
                           <a:latin typeface="+mn-ea"/>
                           <a:ea typeface="+mn-ea"/>
                         </a:rPr>
-                        <a:t>{기계_진행률}</a:t>
-                      </a:r>
-                      <a:r>
-                        <a:rPr b="1" sz="1600">
-                          <a:solidFill>
-                            <a:srgbClr val="FF0000"/>
-                          </a:solidFill>
-                        </a:rPr>
-                        <a:t>{기계_진행률증감}</a:t>
+                        <a:t>{기계_누적}</a:t>
                       </a:r>
                     </a:p>
                   </a:txBody>
@@ -14064,6 +13985,9 @@
                           <a:spcPct val="130000"/>
                         </a:lnSpc>
                       </a:pPr>
+                      <a:r>
+                        <a:t>{기계_진행률}</a:t>
+                      </a:r>
                       <a:endParaRPr lang="en-US" altLang="ko-KR" sz="1600" b="1" u="none" spc="-100" baseline="0" dirty="0">
                         <a:ln>
                           <a:solidFill>
@@ -14263,18 +14187,13 @@
                               </a:schemeClr>
                             </a:solidFill>
                           </a:ln>
+                          <a:solidFill>
+                            <a:srgbClr val="FF0000"/>
+                          </a:solidFill>
                           <a:latin typeface="+mn-ea"/>
                           <a:ea typeface="+mn-ea"/>
                         </a:rPr>
-                        <a:t>{소방_치유}</a:t>
-                      </a:r>
-                      <a:r>
-                        <a:rPr b="1" sz="1600">
-                          <a:solidFill>
-                            <a:srgbClr val="FF0000"/>
-                          </a:solidFill>
-                        </a:rPr>
-                        <a:t>{소방_치유증감}</a:t>
+                        <a:t>{소방_이번주}</a:t>
                       </a:r>
                     </a:p>
                   </a:txBody>
@@ -14342,15 +14261,7 @@
                           <a:latin typeface="+mn-ea"/>
                           <a:ea typeface="+mn-ea"/>
                         </a:rPr>
-                        <a:t>{소방_진행률}</a:t>
-                      </a:r>
-                      <a:r>
-                        <a:rPr b="1" sz="1600">
-                          <a:solidFill>
-                            <a:srgbClr val="FF0000"/>
-                          </a:solidFill>
-                        </a:rPr>
-                        <a:t>{소방_진행률증감}</a:t>
+                        <a:t>{소방_누적}</a:t>
                       </a:r>
                     </a:p>
                   </a:txBody>
@@ -14406,6 +14317,9 @@
                           <a:spcPct val="130000"/>
                         </a:lnSpc>
                       </a:pPr>
+                      <a:r>
+                        <a:t>{소방_진행률}</a:t>
+                      </a:r>
                       <a:endParaRPr lang="en-US" altLang="ko-KR" sz="1600" b="1" u="none" spc="-100" baseline="0" dirty="0">
                         <a:ln>
                           <a:solidFill>
@@ -14605,28 +14519,13 @@
                               </a:schemeClr>
                             </a:solidFill>
                           </a:ln>
-                          <a:latin typeface="+mn-ea"/>
-                          <a:ea typeface="+mn-ea"/>
-                        </a:rPr>
-                        <a:t>{인테리어_치유}</a:t>
-                      </a:r>
-                      <a:r>
-                        <a:rPr lang="en-US" altLang="ko-KR" sz="1600" b="1" kern="1200" spc="-100" baseline="0" dirty="0">
-                          <a:ln>
-                            <a:solidFill>
-                              <a:schemeClr val="accent1">
-                                <a:alpha val="0"/>
-                              </a:schemeClr>
-                            </a:solidFill>
-                          </a:ln>
                           <a:solidFill>
                             <a:srgbClr val="FF0000"/>
                           </a:solidFill>
                           <a:latin typeface="+mn-ea"/>
                           <a:ea typeface="+mn-ea"/>
-                          <a:cs typeface="+mn-cs"/>
                         </a:rPr>
-                        <a:t>{인테리어_치유증감}</a:t>
+                        <a:t>{인테리어_이번주}</a:t>
                       </a:r>
                       <a:endParaRPr lang="en-US" altLang="ko-KR" sz="1600" b="1" u="none" spc="-100" baseline="0" dirty="0">
                         <a:ln>
@@ -14705,25 +14604,7 @@
                           <a:latin typeface="+mn-ea"/>
                           <a:ea typeface="+mn-ea"/>
                         </a:rPr>
-                        <a:t>{인테리어_진행률}</a:t>
-                      </a:r>
-                      <a:r>
-                        <a:rPr lang="en-US" altLang="ko-KR" sz="1600" b="1" kern="1200" spc="-100" baseline="0" dirty="0">
-                          <a:ln>
-                            <a:solidFill>
-                              <a:schemeClr val="accent1">
-                                <a:alpha val="0"/>
-                              </a:schemeClr>
-                            </a:solidFill>
-                          </a:ln>
-                          <a:solidFill>
-                            <a:srgbClr val="FF0000"/>
-                          </a:solidFill>
-                          <a:latin typeface="+mn-ea"/>
-                          <a:ea typeface="+mn-ea"/>
-                          <a:cs typeface="+mn-cs"/>
-                        </a:rPr>
-                        <a:t>{인테리어_진행률증감}</a:t>
+                        <a:t>{인테리어_누적}</a:t>
                       </a:r>
                       <a:endParaRPr lang="en-US" altLang="ko-KR" sz="1600" b="1" u="none" spc="-100" baseline="0" dirty="0">
                         <a:ln>
@@ -14790,6 +14671,9 @@
                           <a:spcPct val="130000"/>
                         </a:lnSpc>
                       </a:pPr>
+                      <a:r>
+                        <a:t>{인테리어_진행률}</a:t>
+                      </a:r>
                       <a:endParaRPr lang="en-US" altLang="ko-KR" sz="1600" b="1" kern="1200" spc="-100" baseline="0" dirty="0">
                         <a:ln>
                           <a:solidFill>
@@ -15053,31 +14937,13 @@
                             </a:solidFill>
                           </a:ln>
                           <a:solidFill>
-                            <a:schemeClr val="tx1"/>
-                          </a:solidFill>
-                          <a:latin typeface="+mn-ea"/>
-                          <a:ea typeface="+mn-ea"/>
-                          <a:cs typeface="+mn-cs"/>
-                        </a:rPr>
-                        <a:t>{합계_치유}</a:t>
-                      </a:r>
-                      <a:r>
-                        <a:rPr lang="en-US" altLang="ko-KR" sz="1600" b="1" kern="1200" spc="-100" baseline="0" dirty="0">
-                          <a:ln>
-                            <a:solidFill>
-                              <a:schemeClr val="accent1">
-                                <a:alpha val="0"/>
-                              </a:schemeClr>
-                            </a:solidFill>
-                          </a:ln>
-                          <a:solidFill>
                             <a:srgbClr val="FF0000"/>
                           </a:solidFill>
                           <a:latin typeface="+mn-ea"/>
                           <a:ea typeface="+mn-ea"/>
                           <a:cs typeface="+mn-cs"/>
                         </a:rPr>
-                        <a:t>{합계_치유증감}</a:t>
+                        <a:t>{합계_이번주}</a:t>
                       </a:r>
                       <a:endParaRPr lang="en-US" altLang="ko-KR" sz="1600" b="1" u="none" spc="-100" baseline="0" dirty="0">
                         <a:ln>
@@ -15172,25 +15038,7 @@
                           <a:ea typeface="+mn-ea"/>
                           <a:cs typeface="+mn-cs"/>
                         </a:rPr>
-                        <a:t>{합계_진행률}</a:t>
-                      </a:r>
-                      <a:r>
-                        <a:rPr lang="en-US" altLang="ko-KR" sz="1600" b="1" kern="1200" spc="-100" baseline="0" dirty="0">
-                          <a:ln>
-                            <a:solidFill>
-                              <a:schemeClr val="accent1">
-                                <a:alpha val="0"/>
-                              </a:schemeClr>
-                            </a:solidFill>
-                          </a:ln>
-                          <a:solidFill>
-                            <a:srgbClr val="FF0000"/>
-                          </a:solidFill>
-                          <a:latin typeface="+mn-ea"/>
-                          <a:ea typeface="+mn-ea"/>
-                          <a:cs typeface="+mn-cs"/>
-                        </a:rPr>
-                        <a:t>{합계_진행률증감}</a:t>
+                        <a:t>{합계_누적}</a:t>
                       </a:r>
                     </a:p>
                   </a:txBody>
@@ -15258,6 +15106,9 @@
                         <a:tabLst/>
                         <a:defRPr/>
                       </a:pPr>
+                      <a:r>
+                        <a:t>{합계_진행률}</a:t>
+                      </a:r>
                       <a:endParaRPr lang="en-US" altLang="ko-KR" sz="1600" b="1" kern="1200" spc="-100" baseline="0" dirty="0">
                         <a:ln>
                           <a:solidFill>
@@ -15367,7 +15218,112 @@
                 <a:latin typeface="+mn-ea"/>
                 <a:cs typeface="Gothic A1 Black" pitchFamily="2" charset="-127"/>
               </a:rPr>
-              <a:t>{기준일}</a:t>
+              <a:t>2026.08.25</a:t>
+            </a:r>
+            <a:r>
+              <a:rPr lang="ko-KR" altLang="en-US" sz="1400" b="1" spc="-150" dirty="0">
+                <a:ln>
+                  <a:solidFill>
+                    <a:srgbClr val="5B9BD5">
+                      <a:shade val="50000"/>
+                      <a:alpha val="0"/>
+                    </a:srgbClr>
+                  </a:solidFill>
+                </a:ln>
+                <a:solidFill>
+                  <a:schemeClr val="tx1">
+                    <a:lumMod val="85000"/>
+                    <a:lumOff val="15000"/>
+                  </a:schemeClr>
+                </a:solidFill>
+                <a:latin typeface="+mn-ea"/>
+                <a:cs typeface="Gothic A1 Black" pitchFamily="2" charset="-127"/>
+              </a:rPr>
+              <a:t> </a:t>
+            </a:r>
+            <a:r>
+              <a:rPr lang="en-US" altLang="ko-KR" sz="1400" b="1" spc="-150" dirty="0">
+                <a:ln>
+                  <a:solidFill>
+                    <a:srgbClr val="5B9BD5">
+                      <a:shade val="50000"/>
+                      <a:alpha val="0"/>
+                    </a:srgbClr>
+                  </a:solidFill>
+                </a:ln>
+                <a:solidFill>
+                  <a:schemeClr val="tx1">
+                    <a:lumMod val="85000"/>
+                    <a:lumOff val="15000"/>
+                  </a:schemeClr>
+                </a:solidFill>
+                <a:latin typeface="+mn-ea"/>
+                <a:cs typeface="Gothic A1 Black" pitchFamily="2" charset="-127"/>
+              </a:rPr>
+              <a:t>(</a:t>
+            </a:r>
+            <a:r>
+              <a:rPr lang="ko-KR" altLang="en-US" sz="1400" b="1" spc="-150" dirty="0">
+                <a:ln>
+                  <a:solidFill>
+                    <a:srgbClr val="5B9BD5">
+                      <a:shade val="50000"/>
+                      <a:alpha val="0"/>
+                    </a:srgbClr>
+                  </a:solidFill>
+                </a:ln>
+                <a:solidFill>
+                  <a:schemeClr val="tx1">
+                    <a:lumMod val="85000"/>
+                    <a:lumOff val="15000"/>
+                  </a:schemeClr>
+                </a:solidFill>
+                <a:latin typeface="+mn-ea"/>
+                <a:cs typeface="Gothic A1 Black" pitchFamily="2" charset="-127"/>
+              </a:rPr>
+              <a:t>화</a:t>
+            </a:r>
+            <a:r>
+              <a:rPr lang="en-US" altLang="ko-KR" sz="1400" b="1" spc="-150" dirty="0">
+                <a:ln>
+                  <a:solidFill>
+                    <a:srgbClr val="5B9BD5">
+                      <a:shade val="50000"/>
+                      <a:alpha val="0"/>
+                    </a:srgbClr>
+                  </a:solidFill>
+                </a:ln>
+                <a:solidFill>
+                  <a:schemeClr val="tx1">
+                    <a:lumMod val="85000"/>
+                    <a:lumOff val="15000"/>
+                  </a:schemeClr>
+                </a:solidFill>
+                <a:latin typeface="+mn-ea"/>
+                <a:cs typeface="Gothic A1 Black" pitchFamily="2" charset="-127"/>
+              </a:rPr>
+              <a:t>) </a:t>
+            </a:r>
+            <a:r>
+              <a:rPr lang="ko-KR" altLang="en-US" sz="1400" b="1" spc="-150" dirty="0">
+                <a:ln>
+                  <a:solidFill>
+                    <a:srgbClr val="5B9BD5">
+                      <a:shade val="50000"/>
+                      <a:alpha val="0"/>
+                    </a:srgbClr>
+                  </a:solidFill>
+                </a:ln>
+                <a:solidFill>
+                  <a:schemeClr val="tx1">
+                    <a:lumMod val="85000"/>
+                    <a:lumOff val="15000"/>
+                  </a:schemeClr>
+                </a:solidFill>
+                <a:latin typeface="+mn-ea"/>
+                <a:cs typeface="Gothic A1 Black" pitchFamily="2" charset="-127"/>
+              </a:rPr>
+              <a:t>기준</a:t>
             </a:r>
             <a:endParaRPr lang="en-US" altLang="ko-KR" sz="1400" b="1" spc="-150" dirty="0">
               <a:ln>
@@ -15420,142 +15376,7 @@
                 </a:solidFill>
                 <a:latin typeface="맑은 고딕"/>
               </a:rPr>
-              <a:t>※ ( ) </a:t>
-            </a:r>
-            <a:r>
-              <a:rPr sz="1200" b="0" dirty="0" err="1">
-                <a:solidFill>
-                  <a:srgbClr val="595959"/>
-                </a:solidFill>
-                <a:latin typeface="맑은 고딕"/>
-              </a:rPr>
-              <a:t>안의</a:t>
-            </a:r>
-            <a:r>
-              <a:rPr sz="1200" b="0" dirty="0">
-                <a:solidFill>
-                  <a:srgbClr val="595959"/>
-                </a:solidFill>
-                <a:latin typeface="맑은 고딕"/>
-              </a:rPr>
-              <a:t> </a:t>
-            </a:r>
-            <a:r>
-              <a:rPr sz="1200" b="0" dirty="0" err="1">
-                <a:solidFill>
-                  <a:srgbClr val="595959"/>
-                </a:solidFill>
-                <a:latin typeface="맑은 고딕"/>
-              </a:rPr>
-              <a:t>숫자는</a:t>
-            </a:r>
-            <a:r>
-              <a:rPr sz="1200" b="0" dirty="0">
-                <a:solidFill>
-                  <a:srgbClr val="595959"/>
-                </a:solidFill>
-                <a:latin typeface="맑은 고딕"/>
-              </a:rPr>
-              <a:t> </a:t>
-            </a:r>
-            <a:r>
-              <a:rPr sz="1200" b="0" dirty="0" err="1">
-                <a:solidFill>
-                  <a:srgbClr val="595959"/>
-                </a:solidFill>
-                <a:latin typeface="맑은 고딕"/>
-              </a:rPr>
-              <a:t>전주</a:t>
-            </a:r>
-            <a:r>
-              <a:rPr sz="1200" b="0" dirty="0">
-                <a:solidFill>
-                  <a:srgbClr val="595959"/>
-                </a:solidFill>
-                <a:latin typeface="맑은 고딕"/>
-              </a:rPr>
-              <a:t> </a:t>
-            </a:r>
-            <a:r>
-              <a:rPr sz="1200" b="0" dirty="0" err="1">
-                <a:solidFill>
-                  <a:srgbClr val="595959"/>
-                </a:solidFill>
-                <a:latin typeface="맑은 고딕"/>
-              </a:rPr>
-              <a:t>대비</a:t>
-            </a:r>
-            <a:r>
-              <a:rPr sz="1200" b="0" dirty="0">
-                <a:solidFill>
-                  <a:srgbClr val="595959"/>
-                </a:solidFill>
-                <a:latin typeface="맑은 고딕"/>
-              </a:rPr>
-              <a:t> </a:t>
-            </a:r>
-            <a:r>
-              <a:rPr sz="1200" b="0" dirty="0" err="1">
-                <a:solidFill>
-                  <a:srgbClr val="595959"/>
-                </a:solidFill>
-                <a:latin typeface="맑은 고딕"/>
-              </a:rPr>
-              <a:t>증감분입니다</a:t>
-            </a:r>
-            <a:r>
-              <a:rPr sz="1200" b="0" dirty="0">
-                <a:solidFill>
-                  <a:srgbClr val="595959"/>
-                </a:solidFill>
-                <a:latin typeface="맑은 고딕"/>
-              </a:rPr>
-              <a:t>.  예) 73 ( +6 ) = </a:t>
-            </a:r>
-            <a:r>
-              <a:rPr sz="1200" b="0" dirty="0" err="1">
-                <a:solidFill>
-                  <a:srgbClr val="595959"/>
-                </a:solidFill>
-                <a:latin typeface="맑은 고딕"/>
-              </a:rPr>
-              <a:t>누적</a:t>
-            </a:r>
-            <a:r>
-              <a:rPr sz="1200" b="0" dirty="0">
-                <a:solidFill>
-                  <a:srgbClr val="595959"/>
-                </a:solidFill>
-                <a:latin typeface="맑은 고딕"/>
-              </a:rPr>
-              <a:t> 73건, </a:t>
-            </a:r>
-            <a:r>
-              <a:rPr sz="1200" b="0" dirty="0" err="1">
-                <a:solidFill>
-                  <a:srgbClr val="595959"/>
-                </a:solidFill>
-                <a:latin typeface="맑은 고딕"/>
-              </a:rPr>
-              <a:t>이번</a:t>
-            </a:r>
-            <a:r>
-              <a:rPr sz="1200" b="0" dirty="0">
-                <a:solidFill>
-                  <a:srgbClr val="595959"/>
-                </a:solidFill>
-                <a:latin typeface="맑은 고딕"/>
-              </a:rPr>
-              <a:t> 주 6건 </a:t>
-            </a:r>
-            <a:r>
-              <a:rPr sz="1200" b="0" dirty="0" err="1">
-                <a:solidFill>
-                  <a:srgbClr val="595959"/>
-                </a:solidFill>
-                <a:latin typeface="맑은 고딕"/>
-              </a:rPr>
-              <a:t>처리</a:t>
+              <a:t>※ ‘이번 주 치유’는 이번 주에 처리한 건수, ‘누적’은 지금까지 치유한 총 건수입니다.</a:t>
             </a:r>
             <a:endParaRPr sz="1200" b="0" dirty="0">
               <a:solidFill>
@@ -15725,70 +15546,21 @@
                     <a:bodyPr/>
                     <a:lstStyle/>
                     <a:p>
-                      <a:pPr marL="0" marR="0" lvl="0" indent="0" algn="l" defTabSz="914400" rtl="0" eaLnBrk="1" fontAlgn="auto" latinLnBrk="1" hangingPunct="1">
+                      <a:pPr marL="0" indent="0" algn="l">
                         <a:lnSpc>
                           <a:spcPct val="130000"/>
                         </a:lnSpc>
-                        <a:spcBef>
-                          <a:spcPts val="0"/>
-                        </a:spcBef>
-                        <a:spcAft>
-                          <a:spcPts val="0"/>
-                        </a:spcAft>
-                        <a:buClrTx/>
-                        <a:buSzTx/>
-                        <a:buFontTx/>
                         <a:buNone/>
-                        <a:tabLst/>
-                        <a:defRPr/>
                       </a:pPr>
                       <a:r>
-                        <a:rPr lang="en-US" sz="1600" b="1" dirty="0">
+                        <a:rPr lang="ko-KR" altLang="en-US" sz="1400" b="1" dirty="0">
                           <a:solidFill>
                             <a:schemeClr val="tx1"/>
                           </a:solidFill>
                           <a:latin typeface="+mn-ea"/>
                           <a:ea typeface="+mn-ea"/>
                         </a:rPr>
-                        <a:t>{개요}</a:t>
-                      </a:r>
-                      <a:br>
-                        <a:rPr lang="en-US" altLang="ko-KR" sz="1600" b="1" dirty="0">
-                          <a:solidFill>
-                            <a:schemeClr val="tx1"/>
-                          </a:solidFill>
-                          <a:latin typeface="+mn-ea"/>
-                          <a:ea typeface="+mn-ea"/>
-                        </a:rPr>
-                      </a:br>
-                    </a:p>
-                    <a:p>
-                      <a:pPr marL="171450" marR="0" lvl="0" indent="-171450" algn="l" defTabSz="914400" rtl="0" eaLnBrk="1" fontAlgn="auto" latinLnBrk="1" hangingPunct="1">
-                        <a:lnSpc>
-                          <a:spcPct val="130000"/>
-                        </a:lnSpc>
-                        <a:spcBef>
-                          <a:spcPts val="0"/>
-                        </a:spcBef>
-                        <a:spcAft>
-                          <a:spcPts val="0"/>
-                        </a:spcAft>
-                        <a:buClrTx/>
-                        <a:buSzTx/>
-                        <a:buFontTx/>
-                        <a:buChar char="-"/>
-                        <a:tabLst/>
-                        <a:defRPr/>
-                      </a:pPr>
-                      <a:r>
-                        <a:rPr lang="en-US" altLang="ko-KR" sz="1200" b="1" dirty="0">
-                          <a:solidFill>
-                            <a:schemeClr val="tx1"/>
-                          </a:solidFill>
-                          <a:latin typeface="+mn-ea"/>
-                          <a:ea typeface="+mn-ea"/>
-                        </a:rPr>
-                        <a:t>{#세부}- {.}{/세부}</a:t>
+                        <a:t xml:space="preserve">{본문}</a:t>
                       </a:r>
                     </a:p>
                   </a:txBody>
@@ -15994,7 +15766,28 @@
                 </a:gradFill>
                 <a:latin typeface="+mn-ea"/>
               </a:rPr>
-              <a:t>{번호} {주제}</a:t>
+              <a:t xml:space="preserve">{번호} </a:t>
+            </a:r>
+            <a:r>
+              <a:rPr lang="en-US" altLang="ko-KR" sz="2000" b="1" spc="-150" dirty="0">
+                <a:ln>
+                  <a:solidFill>
+                    <a:srgbClr val="5B9BD5">
+                      <a:shade val="50000"/>
+                      <a:alpha val="0"/>
+                    </a:srgbClr>
+                  </a:solidFill>
+                </a:ln>
+                <a:solidFill>
+                  <a:schemeClr val="tx1">
+                    <a:lumMod val="85000"/>
+                    <a:lumOff val="15000"/>
+                  </a:schemeClr>
+                </a:solidFill>
+                <a:latin typeface="+mn-ea"/>
+                <a:cs typeface="Gothic A1 Black" pitchFamily="2" charset="-127"/>
+              </a:rPr>
+              <a:t xml:space="preserve">{주제}</a:t>
             </a:r>
           </a:p>
         </p:txBody>

--- a/report/public/templates/weekly.pptx
+++ b/report/public/templates/weekly.pptx
@@ -15553,6 +15553,24 @@
                         <a:buNone/>
                       </a:pPr>
                       <a:r>
+                        <a:rPr lang="ko-KR" altLang="en-US" sz="1400" b="0" dirty="0">
+                          <a:solidFill>
+                            <a:schemeClr val="tx1"/>
+                          </a:solidFill>
+                          <a:latin typeface="+mn-ea"/>
+                          <a:ea typeface="+mn-ea"/>
+                        </a:rPr>
+                        <a:t xml:space="preserve">{#본문}</a:t>
+                      </a:r>
+                    </a:p>
+                    <a:p>
+                      <a:pPr marL="0" indent="0" algn="l">
+                        <a:lnSpc>
+                          <a:spcPct val="130000"/>
+                        </a:lnSpc>
+                        <a:buNone/>
+                      </a:pPr>
+                      <a:r>
                         <a:rPr lang="ko-KR" altLang="en-US" sz="1400" b="1" dirty="0">
                           <a:solidFill>
                             <a:schemeClr val="tx1"/>
@@ -15560,7 +15578,35 @@
                           <a:latin typeface="+mn-ea"/>
                           <a:ea typeface="+mn-ea"/>
                         </a:rPr>
-                        <a:t xml:space="preserve">{본문}</a:t>
+                        <a:t xml:space="preserve">{#볼드}{글}{/볼드}</a:t>
+                      </a:r>
+                      <a:r>
+                        <a:rPr lang="ko-KR" altLang="en-US" sz="1400" b="0" dirty="0">
+                          <a:solidFill>
+                            <a:schemeClr val="tx1"/>
+                          </a:solidFill>
+                          <a:latin typeface="+mn-ea"/>
+                          <a:ea typeface="+mn-ea"/>
+                        </a:rPr>
+                        <a:t xml:space="preserve">{^볼드}{글}{/볼드}</a:t>
+                      </a:r>
+                    </a:p>
+                    <a:p>
+                      <a:pPr marL="0" indent="0" algn="l">
+                        <a:lnSpc>
+                          <a:spcPct val="130000"/>
+                        </a:lnSpc>
+                        <a:buNone/>
+                      </a:pPr>
+                      <a:r>
+                        <a:rPr lang="ko-KR" altLang="en-US" sz="1400" b="0" dirty="0">
+                          <a:solidFill>
+                            <a:schemeClr val="tx1"/>
+                          </a:solidFill>
+                          <a:latin typeface="+mn-ea"/>
+                          <a:ea typeface="+mn-ea"/>
+                        </a:rPr>
+                        <a:t xml:space="preserve">{/본문}</a:t>
                       </a:r>
                     </a:p>
                   </a:txBody>

--- a/report/public/templates/weekly.pptx
+++ b/report/public/templates/weekly.pptx
@@ -15171,183 +15171,6 @@
       </p:graphicFrame>
       <p:sp>
         <p:nvSpPr>
-          <p:cNvPr id="7" name="직사각형 6">
-            <a:extLst>
-              <a:ext uri="{FF2B5EF4-FFF2-40B4-BE49-F238E27FC236}">
-                <a16:creationId xmlns:a16="http://schemas.microsoft.com/office/drawing/2014/main" id="{1752FF59-79D2-ED26-EE16-DE0F351D99F7}"/>
-              </a:ext>
-            </a:extLst>
-          </p:cNvPr>
-          <p:cNvSpPr/>
-          <p:nvPr/>
-        </p:nvSpPr>
-        <p:spPr>
-          <a:xfrm>
-            <a:off x="1103993" y="715989"/>
-            <a:ext cx="1576072" cy="307777"/>
-          </a:xfrm>
-          <a:prstGeom prst="rect">
-            <a:avLst/>
-          </a:prstGeom>
-        </p:spPr>
-        <p:txBody>
-          <a:bodyPr wrap="none">
-            <a:spAutoFit/>
-          </a:bodyPr>
-          <a:lstStyle/>
-          <a:p>
-            <a:pPr lvl="0">
-              <a:defRPr/>
-            </a:pPr>
-            <a:r>
-              <a:rPr lang="en-US" altLang="ko-KR" sz="1400" b="1" spc="-150" dirty="0">
-                <a:ln>
-                  <a:solidFill>
-                    <a:srgbClr val="5B9BD5">
-                      <a:shade val="50000"/>
-                      <a:alpha val="0"/>
-                    </a:srgbClr>
-                  </a:solidFill>
-                </a:ln>
-                <a:solidFill>
-                  <a:schemeClr val="tx1">
-                    <a:lumMod val="85000"/>
-                    <a:lumOff val="15000"/>
-                  </a:schemeClr>
-                </a:solidFill>
-                <a:latin typeface="+mn-ea"/>
-                <a:cs typeface="Gothic A1 Black" pitchFamily="2" charset="-127"/>
-              </a:rPr>
-              <a:t>2026.08.25</a:t>
-            </a:r>
-            <a:r>
-              <a:rPr lang="ko-KR" altLang="en-US" sz="1400" b="1" spc="-150" dirty="0">
-                <a:ln>
-                  <a:solidFill>
-                    <a:srgbClr val="5B9BD5">
-                      <a:shade val="50000"/>
-                      <a:alpha val="0"/>
-                    </a:srgbClr>
-                  </a:solidFill>
-                </a:ln>
-                <a:solidFill>
-                  <a:schemeClr val="tx1">
-                    <a:lumMod val="85000"/>
-                    <a:lumOff val="15000"/>
-                  </a:schemeClr>
-                </a:solidFill>
-                <a:latin typeface="+mn-ea"/>
-                <a:cs typeface="Gothic A1 Black" pitchFamily="2" charset="-127"/>
-              </a:rPr>
-              <a:t> </a:t>
-            </a:r>
-            <a:r>
-              <a:rPr lang="en-US" altLang="ko-KR" sz="1400" b="1" spc="-150" dirty="0">
-                <a:ln>
-                  <a:solidFill>
-                    <a:srgbClr val="5B9BD5">
-                      <a:shade val="50000"/>
-                      <a:alpha val="0"/>
-                    </a:srgbClr>
-                  </a:solidFill>
-                </a:ln>
-                <a:solidFill>
-                  <a:schemeClr val="tx1">
-                    <a:lumMod val="85000"/>
-                    <a:lumOff val="15000"/>
-                  </a:schemeClr>
-                </a:solidFill>
-                <a:latin typeface="+mn-ea"/>
-                <a:cs typeface="Gothic A1 Black" pitchFamily="2" charset="-127"/>
-              </a:rPr>
-              <a:t>(</a:t>
-            </a:r>
-            <a:r>
-              <a:rPr lang="ko-KR" altLang="en-US" sz="1400" b="1" spc="-150" dirty="0">
-                <a:ln>
-                  <a:solidFill>
-                    <a:srgbClr val="5B9BD5">
-                      <a:shade val="50000"/>
-                      <a:alpha val="0"/>
-                    </a:srgbClr>
-                  </a:solidFill>
-                </a:ln>
-                <a:solidFill>
-                  <a:schemeClr val="tx1">
-                    <a:lumMod val="85000"/>
-                    <a:lumOff val="15000"/>
-                  </a:schemeClr>
-                </a:solidFill>
-                <a:latin typeface="+mn-ea"/>
-                <a:cs typeface="Gothic A1 Black" pitchFamily="2" charset="-127"/>
-              </a:rPr>
-              <a:t>화</a:t>
-            </a:r>
-            <a:r>
-              <a:rPr lang="en-US" altLang="ko-KR" sz="1400" b="1" spc="-150" dirty="0">
-                <a:ln>
-                  <a:solidFill>
-                    <a:srgbClr val="5B9BD5">
-                      <a:shade val="50000"/>
-                      <a:alpha val="0"/>
-                    </a:srgbClr>
-                  </a:solidFill>
-                </a:ln>
-                <a:solidFill>
-                  <a:schemeClr val="tx1">
-                    <a:lumMod val="85000"/>
-                    <a:lumOff val="15000"/>
-                  </a:schemeClr>
-                </a:solidFill>
-                <a:latin typeface="+mn-ea"/>
-                <a:cs typeface="Gothic A1 Black" pitchFamily="2" charset="-127"/>
-              </a:rPr>
-              <a:t>) </a:t>
-            </a:r>
-            <a:r>
-              <a:rPr lang="ko-KR" altLang="en-US" sz="1400" b="1" spc="-150" dirty="0">
-                <a:ln>
-                  <a:solidFill>
-                    <a:srgbClr val="5B9BD5">
-                      <a:shade val="50000"/>
-                      <a:alpha val="0"/>
-                    </a:srgbClr>
-                  </a:solidFill>
-                </a:ln>
-                <a:solidFill>
-                  <a:schemeClr val="tx1">
-                    <a:lumMod val="85000"/>
-                    <a:lumOff val="15000"/>
-                  </a:schemeClr>
-                </a:solidFill>
-                <a:latin typeface="+mn-ea"/>
-                <a:cs typeface="Gothic A1 Black" pitchFamily="2" charset="-127"/>
-              </a:rPr>
-              <a:t>기준</a:t>
-            </a:r>
-            <a:endParaRPr lang="en-US" altLang="ko-KR" sz="1400" b="1" spc="-150" dirty="0">
-              <a:ln>
-                <a:solidFill>
-                  <a:srgbClr val="5B9BD5">
-                    <a:shade val="50000"/>
-                    <a:alpha val="0"/>
-                  </a:srgbClr>
-                </a:solidFill>
-              </a:ln>
-              <a:solidFill>
-                <a:schemeClr val="tx1">
-                  <a:lumMod val="85000"/>
-                  <a:lumOff val="15000"/>
-                </a:schemeClr>
-              </a:solidFill>
-              <a:latin typeface="+mn-ea"/>
-              <a:cs typeface="Gothic A1 Black" pitchFamily="2" charset="-127"/>
-            </a:endParaRPr>
-          </a:p>
-        </p:txBody>
-      </p:sp>
-      <p:sp>
-        <p:nvSpPr>
           <p:cNvPr id="16" name="TextBox 15"/>
           <p:cNvSpPr txBox="1"/>
           <p:nvPr/>
